--- a/07-participatory-budgeting/slides-0-budget-intro.pptx
+++ b/07-participatory-budgeting/slides-0-budget-intro.pptx
@@ -7274,7 +7274,7 @@
           <a:p>
             <a:fld id="{28E5C356-B994-4DE9-9B59-572582C45F8D}" type="datetimeFigureOut">
               <a:rPr lang="he-IL" smtClean="0"/>
-              <a:t>כ"א/אייר/תשפ"ה</a:t>
+              <a:t>י"ח/כסלו/תשפ"ו</a:t>
             </a:fld>
             <a:endParaRPr lang="he-IL"/>
           </a:p>
@@ -7473,7 +7473,7 @@
           <a:p>
             <a:fld id="{28E5C356-B994-4DE9-9B59-572582C45F8D}" type="datetimeFigureOut">
               <a:rPr lang="he-IL" smtClean="0"/>
-              <a:t>כ"א/אייר/תשפ"ה</a:t>
+              <a:t>י"ח/כסלו/תשפ"ו</a:t>
             </a:fld>
             <a:endParaRPr lang="he-IL"/>
           </a:p>
@@ -7748,7 +7748,7 @@
           <a:p>
             <a:fld id="{28E5C356-B994-4DE9-9B59-572582C45F8D}" type="datetimeFigureOut">
               <a:rPr lang="he-IL" smtClean="0"/>
-              <a:t>כ"א/אייר/תשפ"ה</a:t>
+              <a:t>י"ח/כסלו/תשפ"ו</a:t>
             </a:fld>
             <a:endParaRPr lang="he-IL"/>
           </a:p>
@@ -8015,7 +8015,7 @@
           <a:p>
             <a:fld id="{28E5C356-B994-4DE9-9B59-572582C45F8D}" type="datetimeFigureOut">
               <a:rPr lang="he-IL" smtClean="0"/>
-              <a:t>כ"א/אייר/תשפ"ה</a:t>
+              <a:t>י"ח/כסלו/תשפ"ו</a:t>
             </a:fld>
             <a:endParaRPr lang="he-IL"/>
           </a:p>
@@ -8429,7 +8429,7 @@
           <a:p>
             <a:fld id="{28E5C356-B994-4DE9-9B59-572582C45F8D}" type="datetimeFigureOut">
               <a:rPr lang="he-IL" smtClean="0"/>
-              <a:t>כ"א/אייר/תשפ"ה</a:t>
+              <a:t>י"ח/כסלו/תשפ"ו</a:t>
             </a:fld>
             <a:endParaRPr lang="he-IL"/>
           </a:p>
@@ -8570,7 +8570,7 @@
           <a:p>
             <a:fld id="{28E5C356-B994-4DE9-9B59-572582C45F8D}" type="datetimeFigureOut">
               <a:rPr lang="he-IL" smtClean="0"/>
-              <a:t>כ"א/אייר/תשפ"ה</a:t>
+              <a:t>י"ח/כסלו/תשפ"ו</a:t>
             </a:fld>
             <a:endParaRPr lang="he-IL"/>
           </a:p>
@@ -8945,7 +8945,7 @@
           <a:p>
             <a:fld id="{28E5C356-B994-4DE9-9B59-572582C45F8D}" type="datetimeFigureOut">
               <a:rPr lang="he-IL" smtClean="0"/>
-              <a:t>כ"א/אייר/תשפ"ה</a:t>
+              <a:t>י"ח/כסלו/תשפ"ו</a:t>
             </a:fld>
             <a:endParaRPr lang="he-IL"/>
           </a:p>
@@ -9257,7 +9257,7 @@
           <a:p>
             <a:fld id="{28E5C356-B994-4DE9-9B59-572582C45F8D}" type="datetimeFigureOut">
               <a:rPr lang="he-IL" smtClean="0"/>
-              <a:t>כ"א/אייר/תשפ"ה</a:t>
+              <a:t>י"ח/כסלו/תשפ"ו</a:t>
             </a:fld>
             <a:endParaRPr lang="he-IL"/>
           </a:p>
@@ -9545,7 +9545,7 @@
           <a:p>
             <a:fld id="{28E5C356-B994-4DE9-9B59-572582C45F8D}" type="datetimeFigureOut">
               <a:rPr lang="he-IL" smtClean="0"/>
-              <a:t>כ"א/אייר/תשפ"ה</a:t>
+              <a:t>י"ח/כסלו/תשפ"ו</a:t>
             </a:fld>
             <a:endParaRPr lang="he-IL"/>
           </a:p>
@@ -9744,7 +9744,7 @@
           <a:p>
             <a:fld id="{28E5C356-B994-4DE9-9B59-572582C45F8D}" type="datetimeFigureOut">
               <a:rPr lang="he-IL" smtClean="0"/>
-              <a:t>כ"א/אייר/תשפ"ה</a:t>
+              <a:t>י"ח/כסלו/תשפ"ו</a:t>
             </a:fld>
             <a:endParaRPr lang="he-IL"/>
           </a:p>
@@ -9953,7 +9953,7 @@
           <a:p>
             <a:fld id="{28E5C356-B994-4DE9-9B59-572582C45F8D}" type="datetimeFigureOut">
               <a:rPr lang="he-IL" smtClean="0"/>
-              <a:t>כ"א/אייר/תשפ"ה</a:t>
+              <a:t>י"ח/כסלו/תשפ"ו</a:t>
             </a:fld>
             <a:endParaRPr lang="he-IL"/>
           </a:p>
@@ -15170,7 +15170,7 @@
           <a:p>
             <a:fld id="{28E5C356-B994-4DE9-9B59-572582C45F8D}" type="datetimeFigureOut">
               <a:rPr lang="he-IL" smtClean="0"/>
-              <a:t>כ"א/אייר/תשפ"ה</a:t>
+              <a:t>י"ח/כסלו/תשפ"ו</a:t>
             </a:fld>
             <a:endParaRPr lang="he-IL"/>
           </a:p>
@@ -16506,9 +16506,7 @@
               </a:path>
             </a:pathLst>
           </a:custGeom>
-          <a:solidFill>
-            <a:srgbClr val="000000"/>
-          </a:solidFill>
+          <a:noFill/>
           <a:ln>
             <a:noFill/>
             <a:prstDash val="solid"/>
